--- a/cursos/recursos/desequilibrios-de-material/14-sacrificios-de-calidad-iii.pptx
+++ b/cursos/recursos/desequilibrios-de-material/14-sacrificios-de-calidad-iii.pptx
@@ -5699,7 +5699,7 @@
                 </a:solidFill>
                 <a:latin typeface="Calibri"/>
               </a:rPr>
-              <a:t>29...Ce4! prepara ...Bg7 impidiendo la respuesta f5-f6 de las blancas, y ya busca activamente la ventaja en lugar de conformarse con la igualdad.</a:t>
+              <a:t>29...Ce4! prepara ...Ag7 impidiendo la respuesta f5-f6 de las blancas, y ya busca activamente la ventaja en lugar de conformarse con la igualdad.</a:t>
             </a:r>
           </a:p>
         </p:txBody>
@@ -5983,7 +5983,7 @@
                 </a:solidFill>
                 <a:latin typeface="Calibri"/>
               </a:rPr>
-              <a:t>Solución: 34…Re7!</a:t>
+              <a:t>Solución: 34…Te7!</a:t>
             </a:r>
           </a:p>
         </p:txBody>

--- a/cursos/recursos/desequilibrios-de-material/14-sacrificios-de-calidad-iii.pptx
+++ b/cursos/recursos/desequilibrios-de-material/14-sacrificios-de-calidad-iii.pptx
@@ -3474,7 +3474,7 @@
                 </a:solidFill>
                 <a:latin typeface="Calibri"/>
               </a:rPr>
-              <a:t>Pista: Pensá en capturar el caballo de h5 con la torre, entregando calidad a cambio de una casilla dominante para el caballo.</a:t>
+              <a:t>Pista: Piensa en capturar el caballo de h5 con la torre, entregando calidad a cambio de una casilla dominante para el caballo.</a:t>
             </a:r>
           </a:p>
         </p:txBody>
@@ -3797,7 +3797,7 @@
                 </a:solidFill>
                 <a:latin typeface="Calibri"/>
               </a:rPr>
-              <a:t>Pista: Pensá en capturar el peón f5 con el caballo, llegando por fin a la casilla soñada.</a:t>
+              <a:t>Pista: Piensa en capturar el peón f5 con el caballo, llegando por fin a la casilla soñada.</a:t>
             </a:r>
           </a:p>
         </p:txBody>
@@ -4120,7 +4120,7 @@
                 </a:solidFill>
                 <a:latin typeface="Calibri"/>
               </a:rPr>
-              <a:t>Pista: Pensá en capturar el peón h5 con la torre, recuperando el material sacrificado varias jugadas atrás.</a:t>
+              <a:t>Pista: Piensa en capturar el peón h5 con la torre, recuperando el material sacrificado varias jugadas atrás.</a:t>
             </a:r>
           </a:p>
         </p:txBody>
@@ -4443,7 +4443,7 @@
                 </a:solidFill>
                 <a:latin typeface="Calibri"/>
               </a:rPr>
-              <a:t>Pista: Pensá en saltar el caballo hacia el centro, a una casilla clara fuertemente protegida.</a:t>
+              <a:t>Pista: Piensa en saltar el caballo hacia el centro, a una casilla clara fuertemente protegida.</a:t>
             </a:r>
           </a:p>
         </p:txBody>
@@ -4878,7 +4878,7 @@
                 </a:solidFill>
                 <a:latin typeface="Calibri"/>
               </a:rPr>
-              <a:t>•  Ganar la calidad no siempre es bueno: si a cambio tu rival obtiene un peón pasado avanzado y una pieza fuerte que lo apoya, podés terminar peor que antes de capturar.</a:t>
+              <a:t>•  Ganar la calidad no siempre es bueno: si a cambio tu rival obtiene un peón pasado avanzado y una pieza fuerte que lo apoya, puedes terminar peor que antes de capturar.</a:t>
             </a:r>
           </a:p>
           <a:p>
@@ -4910,7 +4910,7 @@
                 </a:solidFill>
                 <a:latin typeface="Calibri"/>
               </a:rPr>
-              <a:t>•  Antes de intentar una jugada intermedia o una maniobra defensiva, revisá si el rival tiene un recurso que aparte a tu pieza clave de su diagonal o columna de trabajo, como ocurre con 34...Te7!.</a:t>
+              <a:t>•  Antes de intentar una jugada intermedia o una maniobra defensiva, revisa si el rival tiene un recurso que aparte a tu pieza clave de su diagonal o columna de trabajo, como ocurre con 34...Te7!.</a:t>
             </a:r>
           </a:p>
         </p:txBody>
@@ -5298,7 +5298,7 @@
                 </a:solidFill>
                 <a:latin typeface="Calibri"/>
               </a:rPr>
-              <a:t>Pista: Pensá en avanzar el peón a, apoyado por el alfil de fianchetto, hacia el flanco de dama.</a:t>
+              <a:t>Pista: Piensa en avanzar el peón a, apoyado por el alfil de fianchetto, hacia el flanco de dama.</a:t>
             </a:r>
           </a:p>
         </p:txBody>
@@ -5621,7 +5621,7 @@
                 </a:solidFill>
                 <a:latin typeface="Calibri"/>
               </a:rPr>
-              <a:t>Pista: Pensá en saltar el caballo hacia el centro, hacia una casilla desde donde controle f6 y apoye el reagrupamiento del alfil.</a:t>
+              <a:t>Pista: Piensa en saltar el caballo hacia el centro, hacia una casilla desde donde controle f6 y apoye el reagrupamiento del alfil.</a:t>
             </a:r>
           </a:p>
         </p:txBody>
@@ -5944,7 +5944,7 @@
                 </a:solidFill>
                 <a:latin typeface="Calibri"/>
               </a:rPr>
-              <a:t>Pista: Pensá en una jugada de torre a lo largo de la séptima fila que ataque directamente al alfil.</a:t>
+              <a:t>Pista: Piensa en una jugada de torre a lo largo de la séptima fila que ataque directamente al alfil.</a:t>
             </a:r>
           </a:p>
         </p:txBody>
@@ -6340,7 +6340,7 @@
                 </a:solidFill>
                 <a:latin typeface="Calibri"/>
               </a:rPr>
-              <a:t>•  Ganar la calidad no siempre es bueno: si a cambio tu rival obtiene un peón pasado avanzado y una pieza fuerte que lo apoya, podés terminar peor que antes de capturar.</a:t>
+              <a:t>•  Ganar la calidad no siempre es bueno: si a cambio tu rival obtiene un peón pasado avanzado y una pieza fuerte que lo apoya, puedes terminar peor que antes de capturar.</a:t>
             </a:r>
           </a:p>
           <a:p>
@@ -6372,7 +6372,7 @@
                 </a:solidFill>
                 <a:latin typeface="Calibri"/>
               </a:rPr>
-              <a:t>•  Antes de intentar una jugada intermedia o una maniobra defensiva, revisá si el rival tiene un recurso que aparte a tu pieza clave de su diagonal o columna de trabajo, como ocurre con 34...Te7!.</a:t>
+              <a:t>•  Antes de intentar una jugada intermedia o una maniobra defensiva, revisa si el rival tiene un recurso que aparte a tu pieza clave de su diagonal o columna de trabajo, como ocurre con 34...Te7!.</a:t>
             </a:r>
           </a:p>
         </p:txBody>
@@ -6515,7 +6515,7 @@
                 </a:solidFill>
                 <a:latin typeface="Calibri"/>
               </a:rPr>
-              <a:t>Jugá contra el motor la posición de Pelletier–Kurmann antes del sacrificio de calidad y compará tu evaluación con la decisión real de la partida. Después revisá Matlakov–Carlsen señalando en qué consiste exactamente la solidez estructural que impide a las torres blancas encontrar objetivos claros.</a:t>
+              <a:t>Juega contra el motor la posición de Pelletier–Kurmann antes del sacrificio de calidad y compará tu evaluación con la decisión real de la partida. Después revisa Matlakov–Carlsen señalando en qué consiste exactamente la solidez estructural que impide a las torres blancas encontrar objetivos claros.</a:t>
             </a:r>
           </a:p>
           <a:p>
@@ -6547,7 +6547,7 @@
                 </a:solidFill>
                 <a:latin typeface="Calibri"/>
               </a:rPr>
-              <a:t>En la página del curso podés recorrer cada partida con los comentarios, adivinar las jugadas clave en el tablero y continuar cualquier posición contra el motor (Stockfish). La hoja de ejercicios en PDF reúne los momentos clave de esta lección para resolver sin tablero.</a:t>
+              <a:t>En la página del curso puedes recorrer cada partida con los comentarios, adivinar las jugadas clave en el tablero y continuar cualquier posición contra el motor (Stockfish). La hoja de ejercicios en PDF reúne los momentos clave de esta lección para resolver sin tablero.</a:t>
             </a:r>
           </a:p>
         </p:txBody>
@@ -6586,7 +6586,7 @@
                 </a:solidFill>
                 <a:latin typeface="Calibri"/>
               </a:rPr>
-              <a:t>•  Primero recorré la partida completa leyendo los comentarios.</a:t>
+              <a:t>•  Primero recorre la partida completa leyendo los comentarios.</a:t>
             </a:r>
           </a:p>
           <a:p>
@@ -6602,7 +6602,7 @@
                 </a:solidFill>
                 <a:latin typeface="Calibri"/>
               </a:rPr>
-              <a:t>•  Después hacé el modo "adivinar las jugadas clave" hasta acertar todas.</a:t>
+              <a:t>•  Después haz el modo "adivinar las jugadas clave" hasta acertar todas.</a:t>
             </a:r>
           </a:p>
           <a:p>
@@ -6618,7 +6618,7 @@
                 </a:solidFill>
                 <a:latin typeface="Calibri"/>
               </a:rPr>
-              <a:t>•  Por último respondé el cuestionario y anotá con tus palabras las reglas de la lección.</a:t>
+              <a:t>•  Por último responde el cuestionario y anota con tus palabras las reglas de la lección.</a:t>
             </a:r>
           </a:p>
         </p:txBody>
@@ -7238,7 +7238,7 @@
                 </a:solidFill>
                 <a:latin typeface="Calibri"/>
               </a:rPr>
-              <a:t>•  Usalo para simplificar hacia un final de pieza menor más claro cuando el medio juego se complique.</a:t>
+              <a:t>•  Úsalo para simplificar hacia un final de pieza menor más claro cuando el medio juego se complique.</a:t>
             </a:r>
           </a:p>
           <a:p>
@@ -7254,7 +7254,7 @@
                 </a:solidFill>
                 <a:latin typeface="Calibri"/>
               </a:rPr>
-              <a:t>•  Entregá la calidad para eliminar a la pieza rival más activa si esa pieza sostiene todas las amenazas.</a:t>
+              <a:t>•  Entrega la calidad para eliminar a la pieza rival más activa si esa pieza sostiene todas las amenazas.</a:t>
             </a:r>
           </a:p>
           <a:p>
@@ -7270,7 +7270,7 @@
                 </a:solidFill>
                 <a:latin typeface="Calibri"/>
               </a:rPr>
-              <a:t>•  Verificá que tu posición resultante no tenga debilidades claras que las torres rivales puedan atacar.</a:t>
+              <a:t>•  Verifica que tu posición resultante no tenga debilidades claras que las torres rivales puedan atacar.</a:t>
             </a:r>
           </a:p>
           <a:p>
@@ -7888,7 +7888,7 @@
                 </a:solidFill>
                 <a:latin typeface="Calibri"/>
               </a:rPr>
-              <a:t>Pista: Pensá en avanzar el peón h, ofreciendo un peón al alcance del caballo negro.</a:t>
+              <a:t>Pista: Piensa en avanzar el peón h, ofreciendo un peón al alcance del caballo negro.</a:t>
             </a:r>
           </a:p>
         </p:txBody>

--- a/cursos/recursos/desequilibrios-de-material/14-sacrificios-de-calidad-iii.pptx
+++ b/cursos/recursos/desequilibrios-de-material/14-sacrificios-de-calidad-iii.pptx
@@ -3474,7 +3474,7 @@
                 </a:solidFill>
                 <a:latin typeface="Calibri"/>
               </a:rPr>
-              <a:t>Pista: Pensá en capturar el caballo de h5 con la torre, entregando calidad a cambio de una casilla dominante para el caballo.</a:t>
+              <a:t>Pista: Piensa en capturar el caballo de h5 con la torre, entregando calidad a cambio de una casilla dominante para el caballo.</a:t>
             </a:r>
           </a:p>
         </p:txBody>
@@ -3797,7 +3797,7 @@
                 </a:solidFill>
                 <a:latin typeface="Calibri"/>
               </a:rPr>
-              <a:t>Pista: Pensá en capturar el peón f5 con el caballo, llegando por fin a la casilla soñada.</a:t>
+              <a:t>Pista: Piensa en capturar el peón f5 con el caballo, llegando por fin a la casilla soñada.</a:t>
             </a:r>
           </a:p>
         </p:txBody>
@@ -4120,7 +4120,7 @@
                 </a:solidFill>
                 <a:latin typeface="Calibri"/>
               </a:rPr>
-              <a:t>Pista: Pensá en capturar el peón h5 con la torre, recuperando el material sacrificado varias jugadas atrás.</a:t>
+              <a:t>Pista: Piensa en capturar el peón h5 con la torre, recuperando el material sacrificado varias jugadas atrás.</a:t>
             </a:r>
           </a:p>
         </p:txBody>
@@ -4443,7 +4443,7 @@
                 </a:solidFill>
                 <a:latin typeface="Calibri"/>
               </a:rPr>
-              <a:t>Pista: Pensá en saltar el caballo hacia el centro, a una casilla clara fuertemente protegida.</a:t>
+              <a:t>Pista: Piensa en saltar el caballo hacia el centro, a una casilla clara fuertemente protegida.</a:t>
             </a:r>
           </a:p>
         </p:txBody>
@@ -4878,7 +4878,7 @@
                 </a:solidFill>
                 <a:latin typeface="Calibri"/>
               </a:rPr>
-              <a:t>•  Ganar la calidad no siempre es bueno: si a cambio tu rival obtiene un peón pasado avanzado y una pieza fuerte que lo apoya, podés terminar peor que antes de capturar.</a:t>
+              <a:t>•  Ganar la calidad no siempre es bueno: si a cambio tu rival obtiene un peón pasado avanzado y una pieza fuerte que lo apoya, puedes terminar peor que antes de capturar.</a:t>
             </a:r>
           </a:p>
           <a:p>
@@ -4910,7 +4910,7 @@
                 </a:solidFill>
                 <a:latin typeface="Calibri"/>
               </a:rPr>
-              <a:t>•  Antes de intentar una jugada intermedia o una maniobra defensiva, revisá si el rival tiene un recurso que aparte a tu pieza clave de su diagonal o columna de trabajo, como ocurre con 34...Te7!.</a:t>
+              <a:t>•  Antes de intentar una jugada intermedia o una maniobra defensiva, revisa si el rival tiene un recurso que aparte a tu pieza clave de su diagonal o columna de trabajo, como ocurre con 34...Te7!.</a:t>
             </a:r>
           </a:p>
         </p:txBody>
@@ -5298,7 +5298,7 @@
                 </a:solidFill>
                 <a:latin typeface="Calibri"/>
               </a:rPr>
-              <a:t>Pista: Pensá en avanzar el peón a, apoyado por el alfil de fianchetto, hacia el flanco de dama.</a:t>
+              <a:t>Pista: Piensa en avanzar el peón a, apoyado por el alfil de fianchetto, hacia el flanco de dama.</a:t>
             </a:r>
           </a:p>
         </p:txBody>
@@ -5621,7 +5621,7 @@
                 </a:solidFill>
                 <a:latin typeface="Calibri"/>
               </a:rPr>
-              <a:t>Pista: Pensá en saltar el caballo hacia el centro, hacia una casilla desde donde controle f6 y apoye el reagrupamiento del alfil.</a:t>
+              <a:t>Pista: Piensa en saltar el caballo hacia el centro, hacia una casilla desde donde controle f6 y apoye el reagrupamiento del alfil.</a:t>
             </a:r>
           </a:p>
         </p:txBody>
@@ -5699,7 +5699,7 @@
                 </a:solidFill>
                 <a:latin typeface="Calibri"/>
               </a:rPr>
-              <a:t>29...Ce4! prepara ...Bg7 impidiendo la respuesta f5-f6 de las blancas, y ya busca activamente la ventaja en lugar de conformarse con la igualdad.</a:t>
+              <a:t>29...Ce4! prepara ...Ag7 impidiendo la respuesta f5-f6 de las blancas, y ya busca activamente la ventaja en lugar de conformarse con la igualdad.</a:t>
             </a:r>
           </a:p>
         </p:txBody>
@@ -5944,7 +5944,7 @@
                 </a:solidFill>
                 <a:latin typeface="Calibri"/>
               </a:rPr>
-              <a:t>Pista: Pensá en una jugada de torre a lo largo de la séptima fila que ataque directamente al alfil.</a:t>
+              <a:t>Pista: Piensa en una jugada de torre a lo largo de la séptima fila que ataque directamente al alfil.</a:t>
             </a:r>
           </a:p>
         </p:txBody>
@@ -5983,7 +5983,7 @@
                 </a:solidFill>
                 <a:latin typeface="Calibri"/>
               </a:rPr>
-              <a:t>Solución: 34…Re7!</a:t>
+              <a:t>Solución: 34…Te7!</a:t>
             </a:r>
           </a:p>
         </p:txBody>
@@ -6340,7 +6340,7 @@
                 </a:solidFill>
                 <a:latin typeface="Calibri"/>
               </a:rPr>
-              <a:t>•  Ganar la calidad no siempre es bueno: si a cambio tu rival obtiene un peón pasado avanzado y una pieza fuerte que lo apoya, podés terminar peor que antes de capturar.</a:t>
+              <a:t>•  Ganar la calidad no siempre es bueno: si a cambio tu rival obtiene un peón pasado avanzado y una pieza fuerte que lo apoya, puedes terminar peor que antes de capturar.</a:t>
             </a:r>
           </a:p>
           <a:p>
@@ -6372,7 +6372,7 @@
                 </a:solidFill>
                 <a:latin typeface="Calibri"/>
               </a:rPr>
-              <a:t>•  Antes de intentar una jugada intermedia o una maniobra defensiva, revisá si el rival tiene un recurso que aparte a tu pieza clave de su diagonal o columna de trabajo, como ocurre con 34...Te7!.</a:t>
+              <a:t>•  Antes de intentar una jugada intermedia o una maniobra defensiva, revisa si el rival tiene un recurso que aparte a tu pieza clave de su diagonal o columna de trabajo, como ocurre con 34...Te7!.</a:t>
             </a:r>
           </a:p>
         </p:txBody>
@@ -6515,7 +6515,7 @@
                 </a:solidFill>
                 <a:latin typeface="Calibri"/>
               </a:rPr>
-              <a:t>Jugá contra el motor la posición de Pelletier–Kurmann antes del sacrificio de calidad y compará tu evaluación con la decisión real de la partida. Después revisá Matlakov–Carlsen señalando en qué consiste exactamente la solidez estructural que impide a las torres blancas encontrar objetivos claros.</a:t>
+              <a:t>Juega contra el motor la posición de Pelletier–Kurmann antes del sacrificio de calidad y compará tu evaluación con la decisión real de la partida. Después revisa Matlakov–Carlsen señalando en qué consiste exactamente la solidez estructural que impide a las torres blancas encontrar objetivos claros.</a:t>
             </a:r>
           </a:p>
           <a:p>
@@ -6547,7 +6547,7 @@
                 </a:solidFill>
                 <a:latin typeface="Calibri"/>
               </a:rPr>
-              <a:t>En la página del curso podés recorrer cada partida con los comentarios, adivinar las jugadas clave en el tablero y continuar cualquier posición contra el motor (Stockfish). La hoja de ejercicios en PDF reúne los momentos clave de esta lección para resolver sin tablero.</a:t>
+              <a:t>En la página del curso puedes recorrer cada partida con los comentarios, adivinar las jugadas clave en el tablero y continuar cualquier posición contra el motor (Stockfish). La hoja de ejercicios en PDF reúne los momentos clave de esta lección para resolver sin tablero.</a:t>
             </a:r>
           </a:p>
         </p:txBody>
@@ -6586,7 +6586,7 @@
                 </a:solidFill>
                 <a:latin typeface="Calibri"/>
               </a:rPr>
-              <a:t>•  Primero recorré la partida completa leyendo los comentarios.</a:t>
+              <a:t>•  Primero recorre la partida completa leyendo los comentarios.</a:t>
             </a:r>
           </a:p>
           <a:p>
@@ -6602,7 +6602,7 @@
                 </a:solidFill>
                 <a:latin typeface="Calibri"/>
               </a:rPr>
-              <a:t>•  Después hacé el modo "adivinar las jugadas clave" hasta acertar todas.</a:t>
+              <a:t>•  Después haz el modo "adivinar las jugadas clave" hasta acertar todas.</a:t>
             </a:r>
           </a:p>
           <a:p>
@@ -6618,7 +6618,7 @@
                 </a:solidFill>
                 <a:latin typeface="Calibri"/>
               </a:rPr>
-              <a:t>•  Por último respondé el cuestionario y anotá con tus palabras las reglas de la lección.</a:t>
+              <a:t>•  Por último responde el cuestionario y anota con tus palabras las reglas de la lección.</a:t>
             </a:r>
           </a:p>
         </p:txBody>
@@ -7238,7 +7238,7 @@
                 </a:solidFill>
                 <a:latin typeface="Calibri"/>
               </a:rPr>
-              <a:t>•  Usalo para simplificar hacia un final de pieza menor más claro cuando el medio juego se complique.</a:t>
+              <a:t>•  Úsalo para simplificar hacia un final de pieza menor más claro cuando el medio juego se complique.</a:t>
             </a:r>
           </a:p>
           <a:p>
@@ -7254,7 +7254,7 @@
                 </a:solidFill>
                 <a:latin typeface="Calibri"/>
               </a:rPr>
-              <a:t>•  Entregá la calidad para eliminar a la pieza rival más activa si esa pieza sostiene todas las amenazas.</a:t>
+              <a:t>•  Entrega la calidad para eliminar a la pieza rival más activa si esa pieza sostiene todas las amenazas.</a:t>
             </a:r>
           </a:p>
           <a:p>
@@ -7270,7 +7270,7 @@
                 </a:solidFill>
                 <a:latin typeface="Calibri"/>
               </a:rPr>
-              <a:t>•  Verificá que tu posición resultante no tenga debilidades claras que las torres rivales puedan atacar.</a:t>
+              <a:t>•  Verifica que tu posición resultante no tenga debilidades claras que las torres rivales puedan atacar.</a:t>
             </a:r>
           </a:p>
           <a:p>
@@ -7888,7 +7888,7 @@
                 </a:solidFill>
                 <a:latin typeface="Calibri"/>
               </a:rPr>
-              <a:t>Pista: Pensá en avanzar el peón h, ofreciendo un peón al alcance del caballo negro.</a:t>
+              <a:t>Pista: Piensa en avanzar el peón h, ofreciendo un peón al alcance del caballo negro.</a:t>
             </a:r>
           </a:p>
         </p:txBody>
